--- a/instructor/slides/pptx/lectures/L54a.pptx
+++ b/instructor/slides/pptx/lectures/L54a.pptx
@@ -4019,8 +4019,8 @@
         </p:nvSpPr>
         <p:spPr>
           <a:xfrm>
-            <a:off x="640080" y="1920240"/>
-            <a:ext cx="10972800" cy="1463040"/>
+            <a:off x="640080" y="1828800"/>
+            <a:ext cx="6675120" cy="1645920"/>
           </a:xfrm>
           <a:prstGeom prst="rect">
             <a:avLst/>
@@ -4034,7 +4034,7 @@
           <a:lstStyle/>
           <a:p>
             <a:r>
-              <a:rPr sz="4400" b="1">
+              <a:rPr sz="4000" b="1">
                 <a:solidFill>
                   <a:srgbClr val="FFFFFF"/>
                 </a:solidFill>
@@ -4053,8 +4053,8 @@
         </p:nvSpPr>
         <p:spPr>
           <a:xfrm>
-            <a:off x="640080" y="3657600"/>
-            <a:ext cx="10789920" cy="1097280"/>
+            <a:off x="640080" y="3794760"/>
+            <a:ext cx="6675120" cy="1097280"/>
           </a:xfrm>
           <a:prstGeom prst="rect">
             <a:avLst/>
@@ -4068,7 +4068,7 @@
           <a:lstStyle/>
           <a:p>
             <a:r>
-              <a:rPr sz="2000" b="0">
+              <a:rPr sz="1800" b="0">
                 <a:solidFill>
                   <a:srgbClr val="B7CBDE"/>
                 </a:solidFill>
@@ -4087,8 +4087,8 @@
         </p:nvSpPr>
         <p:spPr>
           <a:xfrm>
-            <a:off x="640080" y="5029200"/>
-            <a:ext cx="10972800" cy="457200"/>
+            <a:off x="640080" y="5120640"/>
+            <a:ext cx="6766560" cy="457200"/>
           </a:xfrm>
           <a:prstGeom prst="rect">
             <a:avLst/>
@@ -4102,7 +4102,7 @@
           <a:lstStyle/>
           <a:p>
             <a:r>
-              <a:rPr sz="1600" b="0">
+              <a:rPr sz="1500" b="0">
                 <a:solidFill>
                   <a:srgbClr val="3EC6FF"/>
                 </a:solidFill>
@@ -4113,6 +4113,30 @@
           </a:p>
         </p:txBody>
       </p:sp>
+      <p:pic>
+        <p:nvPicPr>
+          <p:cNvPr id="7" name="Picture 6" descr="dw-interview.jpg"/>
+          <p:cNvPicPr>
+            <a:picLocks noChangeAspect="1"/>
+          </p:cNvPicPr>
+          <p:nvPr/>
+        </p:nvPicPr>
+        <p:blipFill>
+          <a:blip r:embed="rId2"/>
+          <a:stretch>
+            <a:fillRect/>
+          </a:stretch>
+        </p:blipFill>
+        <p:spPr>
+          <a:xfrm>
+            <a:off x="7452360" y="1325880"/>
+            <a:ext cx="4160520" cy="4160520"/>
+          </a:xfrm>
+          <a:prstGeom prst="rect">
+            <a:avLst/>
+          </a:prstGeom>
+        </p:spPr>
+      </p:pic>
     </p:spTree>
   </p:cSld>
   <p:clrMapOvr>
@@ -4216,8 +4240,8 @@
         </p:nvSpPr>
         <p:spPr>
           <a:xfrm>
-            <a:off x="640080" y="685800"/>
-            <a:ext cx="10972800" cy="1463040"/>
+            <a:off x="640080" y="658368"/>
+            <a:ext cx="7863840" cy="1645920"/>
           </a:xfrm>
           <a:prstGeom prst="rect">
             <a:avLst/>
@@ -4231,7 +4255,7 @@
           <a:lstStyle/>
           <a:p>
             <a:r>
-              <a:rPr sz="3200" b="1">
+              <a:rPr sz="3000" b="1">
                 <a:solidFill>
                   <a:srgbClr val="FFFFFF"/>
                 </a:solidFill>
@@ -4250,8 +4274,8 @@
         </p:nvSpPr>
         <p:spPr>
           <a:xfrm>
-            <a:off x="777240" y="2286000"/>
-            <a:ext cx="10607040" cy="4754880"/>
+            <a:off x="777240" y="2331720"/>
+            <a:ext cx="7498079" cy="4754880"/>
           </a:xfrm>
           <a:prstGeom prst="rect">
             <a:avLst/>
@@ -4270,7 +4294,7 @@
               </a:spcAft>
             </a:pPr>
             <a:r>
-              <a:rPr sz="2400" b="0">
+              <a:rPr sz="2200" b="0">
                 <a:solidFill>
                   <a:srgbClr val="FFFFFF"/>
                 </a:solidFill>
@@ -4281,6 +4305,30 @@
           </a:p>
         </p:txBody>
       </p:sp>
+      <p:pic>
+        <p:nvPicPr>
+          <p:cNvPr id="6" name="Picture 5" descr="dw-interview.jpg"/>
+          <p:cNvPicPr>
+            <a:picLocks noChangeAspect="1"/>
+          </p:cNvPicPr>
+          <p:nvPr/>
+        </p:nvPicPr>
+        <p:blipFill>
+          <a:blip r:embed="rId2"/>
+          <a:stretch>
+            <a:fillRect/>
+          </a:stretch>
+        </p:blipFill>
+        <p:spPr>
+          <a:xfrm>
+            <a:off x="8732520" y="2057400"/>
+            <a:ext cx="2880360" cy="2880360"/>
+          </a:xfrm>
+          <a:prstGeom prst="rect">
+            <a:avLst/>
+          </a:prstGeom>
+        </p:spPr>
+      </p:pic>
     </p:spTree>
   </p:cSld>
   <p:clrMapOvr>
@@ -4384,8 +4432,8 @@
         </p:nvSpPr>
         <p:spPr>
           <a:xfrm>
-            <a:off x="640080" y="685800"/>
-            <a:ext cx="10972800" cy="1463040"/>
+            <a:off x="640080" y="658368"/>
+            <a:ext cx="7863840" cy="1645920"/>
           </a:xfrm>
           <a:prstGeom prst="rect">
             <a:avLst/>
@@ -4399,7 +4447,7 @@
           <a:lstStyle/>
           <a:p>
             <a:r>
-              <a:rPr sz="3200" b="1">
+              <a:rPr sz="3000" b="1">
                 <a:solidFill>
                   <a:srgbClr val="FFFFFF"/>
                 </a:solidFill>
@@ -4418,8 +4466,8 @@
         </p:nvSpPr>
         <p:spPr>
           <a:xfrm>
-            <a:off x="777240" y="2286000"/>
-            <a:ext cx="10607040" cy="4754880"/>
+            <a:off x="777240" y="2331720"/>
+            <a:ext cx="7498079" cy="4754880"/>
           </a:xfrm>
           <a:prstGeom prst="rect">
             <a:avLst/>
@@ -4438,7 +4486,7 @@
               </a:spcAft>
             </a:pPr>
             <a:r>
-              <a:rPr sz="2400" b="0">
+              <a:rPr sz="2200" b="0">
                 <a:solidFill>
                   <a:srgbClr val="FFFFFF"/>
                 </a:solidFill>
@@ -4454,7 +4502,7 @@
               </a:spcAft>
             </a:pPr>
             <a:r>
-              <a:rPr sz="2400" b="0">
+              <a:rPr sz="2200" b="0">
                 <a:solidFill>
                   <a:srgbClr val="FFFFFF"/>
                 </a:solidFill>
@@ -4465,6 +4513,30 @@
           </a:p>
         </p:txBody>
       </p:sp>
+      <p:pic>
+        <p:nvPicPr>
+          <p:cNvPr id="6" name="Picture 5" descr="dw-interview.jpg"/>
+          <p:cNvPicPr>
+            <a:picLocks noChangeAspect="1"/>
+          </p:cNvPicPr>
+          <p:nvPr/>
+        </p:nvPicPr>
+        <p:blipFill>
+          <a:blip r:embed="rId2"/>
+          <a:stretch>
+            <a:fillRect/>
+          </a:stretch>
+        </p:blipFill>
+        <p:spPr>
+          <a:xfrm>
+            <a:off x="8732520" y="2057400"/>
+            <a:ext cx="2880360" cy="2880360"/>
+          </a:xfrm>
+          <a:prstGeom prst="rect">
+            <a:avLst/>
+          </a:prstGeom>
+        </p:spPr>
+      </p:pic>
     </p:spTree>
   </p:cSld>
   <p:clrMapOvr>
@@ -4568,8 +4640,8 @@
         </p:nvSpPr>
         <p:spPr>
           <a:xfrm>
-            <a:off x="640080" y="685800"/>
-            <a:ext cx="10972800" cy="1463040"/>
+            <a:off x="640080" y="658368"/>
+            <a:ext cx="10972800" cy="1645920"/>
           </a:xfrm>
           <a:prstGeom prst="rect">
             <a:avLst/>
@@ -4583,7 +4655,7 @@
           <a:lstStyle/>
           <a:p>
             <a:r>
-              <a:rPr sz="3200" b="1">
+              <a:rPr sz="3000" b="1">
                 <a:solidFill>
                   <a:srgbClr val="FFFFFF"/>
                 </a:solidFill>
@@ -4945,8 +5017,8 @@
         </p:nvSpPr>
         <p:spPr>
           <a:xfrm>
-            <a:off x="640080" y="685800"/>
-            <a:ext cx="10972800" cy="1463040"/>
+            <a:off x="640080" y="658368"/>
+            <a:ext cx="7863840" cy="1645920"/>
           </a:xfrm>
           <a:prstGeom prst="rect">
             <a:avLst/>
@@ -4960,7 +5032,7 @@
           <a:lstStyle/>
           <a:p>
             <a:r>
-              <a:rPr sz="3200" b="1">
+              <a:rPr sz="3000" b="1">
                 <a:solidFill>
                   <a:srgbClr val="FFFFFF"/>
                 </a:solidFill>
@@ -4979,8 +5051,8 @@
         </p:nvSpPr>
         <p:spPr>
           <a:xfrm>
-            <a:off x="777240" y="2286000"/>
-            <a:ext cx="10607040" cy="4754880"/>
+            <a:off x="777240" y="2331720"/>
+            <a:ext cx="7498079" cy="4754880"/>
           </a:xfrm>
           <a:prstGeom prst="rect">
             <a:avLst/>
@@ -4999,7 +5071,7 @@
               </a:spcAft>
             </a:pPr>
             <a:r>
-              <a:rPr sz="2400" b="0">
+              <a:rPr sz="2200" b="0">
                 <a:solidFill>
                   <a:srgbClr val="FFFFFF"/>
                 </a:solidFill>
@@ -5010,6 +5082,30 @@
           </a:p>
         </p:txBody>
       </p:sp>
+      <p:pic>
+        <p:nvPicPr>
+          <p:cNvPr id="6" name="Picture 5" descr="dw-interview.jpg"/>
+          <p:cNvPicPr>
+            <a:picLocks noChangeAspect="1"/>
+          </p:cNvPicPr>
+          <p:nvPr/>
+        </p:nvPicPr>
+        <p:blipFill>
+          <a:blip r:embed="rId2"/>
+          <a:stretch>
+            <a:fillRect/>
+          </a:stretch>
+        </p:blipFill>
+        <p:spPr>
+          <a:xfrm>
+            <a:off x="8732520" y="2057400"/>
+            <a:ext cx="2880360" cy="2880360"/>
+          </a:xfrm>
+          <a:prstGeom prst="rect">
+            <a:avLst/>
+          </a:prstGeom>
+        </p:spPr>
+      </p:pic>
     </p:spTree>
   </p:cSld>
   <p:clrMapOvr>
@@ -5113,8 +5209,8 @@
         </p:nvSpPr>
         <p:spPr>
           <a:xfrm>
-            <a:off x="640080" y="685800"/>
-            <a:ext cx="10972800" cy="1463040"/>
+            <a:off x="640080" y="658368"/>
+            <a:ext cx="7863840" cy="1645920"/>
           </a:xfrm>
           <a:prstGeom prst="rect">
             <a:avLst/>
@@ -5128,7 +5224,7 @@
           <a:lstStyle/>
           <a:p>
             <a:r>
-              <a:rPr sz="3200" b="1">
+              <a:rPr sz="3000" b="1">
                 <a:solidFill>
                   <a:srgbClr val="FFFFFF"/>
                 </a:solidFill>
@@ -5147,8 +5243,8 @@
         </p:nvSpPr>
         <p:spPr>
           <a:xfrm>
-            <a:off x="777240" y="2286000"/>
-            <a:ext cx="10607040" cy="4754880"/>
+            <a:off x="777240" y="2331720"/>
+            <a:ext cx="7498079" cy="4754880"/>
           </a:xfrm>
           <a:prstGeom prst="rect">
             <a:avLst/>
@@ -5167,7 +5263,7 @@
               </a:spcAft>
             </a:pPr>
             <a:r>
-              <a:rPr sz="2400" b="0">
+              <a:rPr sz="2200" b="0">
                 <a:solidFill>
                   <a:srgbClr val="FFFFFF"/>
                 </a:solidFill>
@@ -5183,7 +5279,7 @@
               </a:spcAft>
             </a:pPr>
             <a:r>
-              <a:rPr sz="2400" b="0">
+              <a:rPr sz="2200" b="0">
                 <a:solidFill>
                   <a:srgbClr val="FFFFFF"/>
                 </a:solidFill>
@@ -5199,7 +5295,7 @@
               </a:spcAft>
             </a:pPr>
             <a:r>
-              <a:rPr sz="2400" b="0">
+              <a:rPr sz="2200" b="0">
                 <a:solidFill>
                   <a:srgbClr val="FFFFFF"/>
                 </a:solidFill>
@@ -5210,6 +5306,30 @@
           </a:p>
         </p:txBody>
       </p:sp>
+      <p:pic>
+        <p:nvPicPr>
+          <p:cNvPr id="6" name="Picture 5" descr="dw-interview.jpg"/>
+          <p:cNvPicPr>
+            <a:picLocks noChangeAspect="1"/>
+          </p:cNvPicPr>
+          <p:nvPr/>
+        </p:nvPicPr>
+        <p:blipFill>
+          <a:blip r:embed="rId2"/>
+          <a:stretch>
+            <a:fillRect/>
+          </a:stretch>
+        </p:blipFill>
+        <p:spPr>
+          <a:xfrm>
+            <a:off x="8732520" y="2057400"/>
+            <a:ext cx="2880360" cy="2880360"/>
+          </a:xfrm>
+          <a:prstGeom prst="rect">
+            <a:avLst/>
+          </a:prstGeom>
+        </p:spPr>
+      </p:pic>
     </p:spTree>
   </p:cSld>
   <p:clrMapOvr>
@@ -5313,8 +5433,8 @@
         </p:nvSpPr>
         <p:spPr>
           <a:xfrm>
-            <a:off x="640080" y="685800"/>
-            <a:ext cx="10972800" cy="1463040"/>
+            <a:off x="640080" y="658368"/>
+            <a:ext cx="10972800" cy="1645920"/>
           </a:xfrm>
           <a:prstGeom prst="rect">
             <a:avLst/>
@@ -5328,7 +5448,7 @@
           <a:lstStyle/>
           <a:p>
             <a:r>
-              <a:rPr sz="3200" b="1">
+              <a:rPr sz="3000" b="1">
                 <a:solidFill>
                   <a:srgbClr val="FFFFFF"/>
                 </a:solidFill>
